--- a/templates/growth.pptx
+++ b/templates/growth.pptx
@@ -9587,12 +9587,24 @@
                   <a:solidFill>
                     <a:srgbClr val="1B2437"/>
                   </a:solidFill>
+                  <a:latin typeface="Playfair Display Bold"/>
+                  <a:ea typeface="Playfair Display Bold"/>
+                  <a:cs typeface="Playfair Display Bold"/>
+                  <a:sym typeface="Playfair Display Bold"/>
+                </a:rPr>
+                <a:t>₹</a:t>
+              </a:r>
+              <a:r>
+                <a:rPr lang="en-US" sz="2971">
+                  <a:solidFill>
+                    <a:srgbClr val="1B2437"/>
+                  </a:solidFill>
                   <a:latin typeface="Georgia"/>
                   <a:ea typeface="Georgia"/>
                   <a:cs typeface="Georgia"/>
                   <a:sym typeface="Georgia"/>
                 </a:rPr>
-                <a:t>₹75,000</a:t>
+                <a:t>75,000</a:t>
               </a:r>
             </a:p>
           </p:txBody>
@@ -10049,12 +10061,24 @@
                   <a:solidFill>
                     <a:srgbClr val="1B2437"/>
                   </a:solidFill>
+                  <a:latin typeface="Playfair Display Bold"/>
+                  <a:ea typeface="Playfair Display Bold"/>
+                  <a:cs typeface="Playfair Display Bold"/>
+                  <a:sym typeface="Playfair Display Bold"/>
+                </a:rPr>
+                <a:t>₹</a:t>
+              </a:r>
+              <a:r>
+                <a:rPr lang="en-US" sz="2971">
+                  <a:solidFill>
+                    <a:srgbClr val="1B2437"/>
+                  </a:solidFill>
                   <a:latin typeface="Georgia"/>
                   <a:ea typeface="Georgia"/>
                   <a:cs typeface="Georgia"/>
                   <a:sym typeface="Georgia"/>
                 </a:rPr>
-                <a:t>₹50,000</a:t>
+                <a:t>50,000</a:t>
               </a:r>
             </a:p>
           </p:txBody>
@@ -10511,12 +10535,24 @@
                   <a:solidFill>
                     <a:srgbClr val="1B2437"/>
                   </a:solidFill>
+                  <a:latin typeface="Playfair Display Bold"/>
+                  <a:ea typeface="Playfair Display Bold"/>
+                  <a:cs typeface="Playfair Display Bold"/>
+                  <a:sym typeface="Playfair Display Bold"/>
+                </a:rPr>
+                <a:t>₹</a:t>
+              </a:r>
+              <a:r>
+                <a:rPr lang="en-US" sz="2971">
+                  <a:solidFill>
+                    <a:srgbClr val="1B2437"/>
+                  </a:solidFill>
                   <a:latin typeface="Georgia"/>
                   <a:ea typeface="Georgia"/>
                   <a:cs typeface="Georgia"/>
                   <a:sym typeface="Georgia"/>
                 </a:rPr>
-                <a:t>₹1,25,000</a:t>
+                <a:t>1,25,000</a:t>
               </a:r>
             </a:p>
           </p:txBody>
@@ -11035,7 +11071,31 @@
                 <a:cs typeface="Georgia"/>
                 <a:sym typeface="Georgia"/>
               </a:rPr>
-              <a:t>The Care Plan is ₹30,000 per month and is:</a:t>
+              <a:t>The Care Plan is </a:t>
+            </a:r>
+            <a:r>
+              <a:rPr lang="en-US" sz="3183">
+                <a:solidFill>
+                  <a:srgbClr val="2A3242"/>
+                </a:solidFill>
+                <a:latin typeface="Playfair Display Bold"/>
+                <a:ea typeface="Playfair Display Bold"/>
+                <a:cs typeface="Playfair Display Bold"/>
+                <a:sym typeface="Playfair Display Bold"/>
+              </a:rPr>
+              <a:t>₹</a:t>
+            </a:r>
+            <a:r>
+              <a:rPr lang="en-US" sz="3183">
+                <a:solidFill>
+                  <a:srgbClr val="2A3242"/>
+                </a:solidFill>
+                <a:latin typeface="Georgia"/>
+                <a:ea typeface="Georgia"/>
+                <a:cs typeface="Georgia"/>
+                <a:sym typeface="Georgia"/>
+              </a:rPr>
+              <a:t>30,000 per month and is:</a:t>
             </a:r>
           </a:p>
         </p:txBody>
@@ -14701,12 +14761,24 @@
                   <a:solidFill>
                     <a:srgbClr val="1B2437"/>
                   </a:solidFill>
+                  <a:latin typeface="Playfair Display Bold"/>
+                  <a:ea typeface="Playfair Display Bold"/>
+                  <a:cs typeface="Playfair Display Bold"/>
+                  <a:sym typeface="Playfair Display Bold"/>
+                </a:rPr>
+                <a:t>₹</a:t>
+              </a:r>
+              <a:r>
+                <a:rPr lang="en-US" sz="2971">
+                  <a:solidFill>
+                    <a:srgbClr val="1B2437"/>
+                  </a:solidFill>
                   <a:latin typeface="Georgia"/>
                   <a:ea typeface="Georgia"/>
                   <a:cs typeface="Georgia"/>
                   <a:sym typeface="Georgia"/>
                 </a:rPr>
-                <a:t>₹1,25,000 one-time</a:t>
+                <a:t>1,25,000 one-time</a:t>
               </a:r>
             </a:p>
           </p:txBody>
@@ -15009,12 +15081,24 @@
                   <a:solidFill>
                     <a:srgbClr val="1B2437"/>
                   </a:solidFill>
+                  <a:latin typeface="Playfair Display Bold"/>
+                  <a:ea typeface="Playfair Display Bold"/>
+                  <a:cs typeface="Playfair Display Bold"/>
+                  <a:sym typeface="Playfair Display Bold"/>
+                </a:rPr>
+                <a:t>₹</a:t>
+              </a:r>
+              <a:r>
+                <a:rPr lang="en-US" sz="2971">
+                  <a:solidFill>
+                    <a:srgbClr val="1B2437"/>
+                  </a:solidFill>
                   <a:latin typeface="Georgia"/>
                   <a:ea typeface="Georgia"/>
                   <a:cs typeface="Georgia"/>
                   <a:sym typeface="Georgia"/>
                 </a:rPr>
-                <a:t>₹30,000 / month</a:t>
+                <a:t>30,000 / month</a:t>
               </a:r>
             </a:p>
           </p:txBody>
@@ -16113,12 +16197,24 @@
                 <a:solidFill>
                   <a:srgbClr val="2A3242"/>
                 </a:solidFill>
-                <a:latin typeface="Georgia"/>
-                <a:ea typeface="Georgia"/>
-                <a:cs typeface="Georgia"/>
-                <a:sym typeface="Georgia"/>
-              </a:rPr>
-              <a:t>₹75,000 — 60% advance</a:t>
+                <a:latin typeface="Playfair Display Bold"/>
+                <a:ea typeface="Playfair Display Bold"/>
+                <a:cs typeface="Playfair Display Bold"/>
+                <a:sym typeface="Playfair Display Bold"/>
+              </a:rPr>
+              <a:t>₹</a:t>
+            </a:r>
+            <a:r>
+              <a:rPr lang="en-US" sz="2971">
+                <a:solidFill>
+                  <a:srgbClr val="2A3242"/>
+                </a:solidFill>
+                <a:latin typeface="Georgia"/>
+                <a:ea typeface="Georgia"/>
+                <a:cs typeface="Georgia"/>
+                <a:sym typeface="Georgia"/>
+              </a:rPr>
+              <a:t>75,000 — 60% advance</a:t>
             </a:r>
           </a:p>
         </p:txBody>
@@ -16154,12 +16250,24 @@
                 <a:solidFill>
                   <a:srgbClr val="2A3242"/>
                 </a:solidFill>
-                <a:latin typeface="Georgia"/>
-                <a:ea typeface="Georgia"/>
-                <a:cs typeface="Georgia"/>
-                <a:sym typeface="Georgia"/>
-              </a:rPr>
-              <a:t>₹50,000 — 40% on completion and sign-off</a:t>
+                <a:latin typeface="Playfair Display Bold"/>
+                <a:ea typeface="Playfair Display Bold"/>
+                <a:cs typeface="Playfair Display Bold"/>
+                <a:sym typeface="Playfair Display Bold"/>
+              </a:rPr>
+              <a:t>₹</a:t>
+            </a:r>
+            <a:r>
+              <a:rPr lang="en-US" sz="2971">
+                <a:solidFill>
+                  <a:srgbClr val="2A3242"/>
+                </a:solidFill>
+                <a:latin typeface="Georgia"/>
+                <a:ea typeface="Georgia"/>
+                <a:cs typeface="Georgia"/>
+                <a:sym typeface="Georgia"/>
+              </a:rPr>
+              <a:t>50,000 — 40% on completion and sign-off</a:t>
             </a:r>
           </a:p>
         </p:txBody>
@@ -16236,12 +16344,24 @@
                 <a:solidFill>
                   <a:srgbClr val="2A3242"/>
                 </a:solidFill>
-                <a:latin typeface="Georgia"/>
-                <a:ea typeface="Georgia"/>
-                <a:cs typeface="Georgia"/>
-                <a:sym typeface="Georgia"/>
-              </a:rPr>
-              <a:t>₹30,000 / month</a:t>
+                <a:latin typeface="Playfair Display Bold"/>
+                <a:ea typeface="Playfair Display Bold"/>
+                <a:cs typeface="Playfair Display Bold"/>
+                <a:sym typeface="Playfair Display Bold"/>
+              </a:rPr>
+              <a:t>₹</a:t>
+            </a:r>
+            <a:r>
+              <a:rPr lang="en-US" sz="2971">
+                <a:solidFill>
+                  <a:srgbClr val="2A3242"/>
+                </a:solidFill>
+                <a:latin typeface="Georgia"/>
+                <a:ea typeface="Georgia"/>
+                <a:cs typeface="Georgia"/>
+                <a:sym typeface="Georgia"/>
+              </a:rPr>
+              <a:t>30,000 / month</a:t>
             </a:r>
           </a:p>
         </p:txBody>
